--- a/slide/themes/src/32_the strategy.pptx
+++ b/slide/themes/src/32_the strategy.pptx
@@ -845,9 +845,6 @@
                     <a:lumMod val="95000"/>
                   </a:schemeClr>
                 </a:solidFill>
-                <a:latin typeface="Ubuntu"/>
-                <a:ea typeface="Ubuntu"/>
-                <a:cs typeface="Ubuntu"/>
               </a:defRPr>
             </a:lvl1pPr>
             <a:lvl2pPr marL="457200" indent="0" algn="l">
@@ -858,9 +855,6 @@
                     <a:lumMod val="95000"/>
                   </a:schemeClr>
                 </a:solidFill>
-                <a:latin typeface="Ubuntu"/>
-                <a:ea typeface="Ubuntu"/>
-                <a:cs typeface="Ubuntu"/>
               </a:defRPr>
             </a:lvl2pPr>
             <a:lvl3pPr marL="914400" indent="0" algn="l">
@@ -871,9 +865,6 @@
                     <a:lumMod val="95000"/>
                   </a:schemeClr>
                 </a:solidFill>
-                <a:latin typeface="Ubuntu"/>
-                <a:ea typeface="Ubuntu"/>
-                <a:cs typeface="Ubuntu"/>
               </a:defRPr>
             </a:lvl3pPr>
             <a:lvl4pPr marL="1371600" indent="0" algn="l">
@@ -884,9 +875,6 @@
                     <a:lumMod val="95000"/>
                   </a:schemeClr>
                 </a:solidFill>
-                <a:latin typeface="Ubuntu"/>
-                <a:ea typeface="Ubuntu"/>
-                <a:cs typeface="Ubuntu"/>
               </a:defRPr>
             </a:lvl4pPr>
             <a:lvl5pPr marL="1828800" indent="0" algn="l">
@@ -897,9 +885,6 @@
                     <a:lumMod val="95000"/>
                   </a:schemeClr>
                 </a:solidFill>
-                <a:latin typeface="Ubuntu"/>
-                <a:ea typeface="Ubuntu"/>
-                <a:cs typeface="Ubuntu"/>
               </a:defRPr>
             </a:lvl5pPr>
             <a:lvl6pPr marL="2286000" indent="0" algn="l">
@@ -910,9 +895,6 @@
                     <a:lumMod val="95000"/>
                   </a:schemeClr>
                 </a:solidFill>
-                <a:latin typeface="Ubuntu"/>
-                <a:ea typeface="Ubuntu"/>
-                <a:cs typeface="Ubuntu"/>
               </a:defRPr>
             </a:lvl6pPr>
             <a:lvl7pPr marL="2743200" indent="0" algn="l">
@@ -923,9 +905,6 @@
                     <a:lumMod val="95000"/>
                   </a:schemeClr>
                 </a:solidFill>
-                <a:latin typeface="Ubuntu"/>
-                <a:ea typeface="Ubuntu"/>
-                <a:cs typeface="Ubuntu"/>
               </a:defRPr>
             </a:lvl7pPr>
             <a:lvl8pPr marL="3200400" indent="0" algn="l">
@@ -936,9 +915,6 @@
                     <a:lumMod val="95000"/>
                   </a:schemeClr>
                 </a:solidFill>
-                <a:latin typeface="Ubuntu"/>
-                <a:ea typeface="Ubuntu"/>
-                <a:cs typeface="Ubuntu"/>
               </a:defRPr>
             </a:lvl8pPr>
             <a:lvl9pPr marL="3657600" indent="0" algn="l">
@@ -949,9 +925,6 @@
                     <a:lumMod val="95000"/>
                   </a:schemeClr>
                 </a:solidFill>
-                <a:latin typeface="Ubuntu"/>
-                <a:ea typeface="Ubuntu"/>
-                <a:cs typeface="Ubuntu"/>
               </a:defRPr>
             </a:lvl9pPr>
           </a:lstStyle>
@@ -4905,66 +4878,31 @@
                     <a:lumMod val="50000"/>
                   </a:schemeClr>
                 </a:solidFill>
-                <a:latin typeface="Arial"/>
-                <a:ea typeface="Arial"/>
-                <a:cs typeface="Arial"/>
               </a:defRPr>
             </a:lvl1pPr>
             <a:lvl2pPr>
-              <a:defRPr>
-                <a:latin typeface="Arial"/>
-                <a:ea typeface="Arial"/>
-                <a:cs typeface="Arial"/>
-              </a:defRPr>
+              <a:defRPr/>
             </a:lvl2pPr>
             <a:lvl3pPr>
-              <a:defRPr>
-                <a:latin typeface="Arial"/>
-                <a:ea typeface="Arial"/>
-                <a:cs typeface="Arial"/>
-              </a:defRPr>
+              <a:defRPr/>
             </a:lvl3pPr>
             <a:lvl4pPr>
-              <a:defRPr>
-                <a:latin typeface="Arial"/>
-                <a:ea typeface="Arial"/>
-                <a:cs typeface="Arial"/>
-              </a:defRPr>
+              <a:defRPr/>
             </a:lvl4pPr>
             <a:lvl5pPr>
-              <a:defRPr>
-                <a:latin typeface="Arial"/>
-                <a:ea typeface="Arial"/>
-                <a:cs typeface="Arial"/>
-              </a:defRPr>
+              <a:defRPr/>
             </a:lvl5pPr>
             <a:lvl6pPr>
-              <a:defRPr>
-                <a:latin typeface="Arial"/>
-                <a:ea typeface="Arial"/>
-                <a:cs typeface="Arial"/>
-              </a:defRPr>
+              <a:defRPr/>
             </a:lvl6pPr>
             <a:lvl7pPr>
-              <a:defRPr>
-                <a:latin typeface="Arial"/>
-                <a:ea typeface="Arial"/>
-                <a:cs typeface="Arial"/>
-              </a:defRPr>
+              <a:defRPr/>
             </a:lvl7pPr>
             <a:lvl8pPr>
-              <a:defRPr>
-                <a:latin typeface="Arial"/>
-                <a:ea typeface="Arial"/>
-                <a:cs typeface="Arial"/>
-              </a:defRPr>
+              <a:defRPr/>
             </a:lvl8pPr>
             <a:lvl9pPr>
-              <a:defRPr>
-                <a:latin typeface="Arial"/>
-                <a:ea typeface="Arial"/>
-                <a:cs typeface="Arial"/>
-              </a:defRPr>
+              <a:defRPr/>
             </a:lvl9pPr>
           </a:lstStyle>
           <a:p>
@@ -5012,74 +4950,39 @@
                     <a:lumOff val="5000"/>
                   </a:schemeClr>
                 </a:solidFill>
-                <a:latin typeface="Arial"/>
-                <a:ea typeface="Arial"/>
-                <a:cs typeface="Arial"/>
               </a:defRPr>
             </a:lvl1pPr>
             <a:lvl2pPr>
               <a:buNone/>
-              <a:defRPr sz="2200">
-                <a:latin typeface="Arial"/>
-                <a:ea typeface="Arial"/>
-                <a:cs typeface="Arial"/>
-              </a:defRPr>
+              <a:defRPr sz="2200"/>
             </a:lvl2pPr>
             <a:lvl3pPr>
               <a:buNone/>
-              <a:defRPr sz="1800">
-                <a:latin typeface="Arial"/>
-                <a:ea typeface="Arial"/>
-                <a:cs typeface="Arial"/>
-              </a:defRPr>
+              <a:defRPr sz="1800"/>
             </a:lvl3pPr>
             <a:lvl4pPr>
               <a:buNone/>
-              <a:defRPr sz="1600">
-                <a:latin typeface="Arial"/>
-                <a:ea typeface="Arial"/>
-                <a:cs typeface="Arial"/>
-              </a:defRPr>
+              <a:defRPr sz="1600"/>
             </a:lvl4pPr>
             <a:lvl5pPr>
               <a:buNone/>
-              <a:defRPr sz="1400">
-                <a:latin typeface="Arial"/>
-                <a:ea typeface="Arial"/>
-                <a:cs typeface="Arial"/>
-              </a:defRPr>
+              <a:defRPr sz="1400"/>
             </a:lvl5pPr>
             <a:lvl6pPr>
               <a:buNone/>
-              <a:defRPr>
-                <a:latin typeface="Arial"/>
-                <a:ea typeface="Arial"/>
-                <a:cs typeface="Arial"/>
-              </a:defRPr>
+              <a:defRPr/>
             </a:lvl6pPr>
             <a:lvl7pPr>
               <a:buNone/>
-              <a:defRPr>
-                <a:latin typeface="Arial"/>
-                <a:ea typeface="Arial"/>
-                <a:cs typeface="Arial"/>
-              </a:defRPr>
+              <a:defRPr/>
             </a:lvl7pPr>
             <a:lvl8pPr>
               <a:buNone/>
-              <a:defRPr>
-                <a:latin typeface="Arial"/>
-                <a:ea typeface="Arial"/>
-                <a:cs typeface="Arial"/>
-              </a:defRPr>
+              <a:defRPr/>
             </a:lvl8pPr>
             <a:lvl9pPr>
               <a:buNone/>
-              <a:defRPr>
-                <a:latin typeface="Arial"/>
-                <a:ea typeface="Arial"/>
-                <a:cs typeface="Arial"/>
-              </a:defRPr>
+              <a:defRPr/>
             </a:lvl9pPr>
           </a:lstStyle>
           <a:p>
@@ -5694,12 +5597,12 @@
     <a:fontScheme name="Office Theme">
       <a:majorFont>
         <a:latin typeface="Arial"/>
-        <a:ea typeface="SimSun"/>
+        <a:ea typeface="Microsoft YaHei"/>
         <a:cs typeface="Arial"/>
       </a:majorFont>
       <a:minorFont>
         <a:latin typeface="Arial"/>
-        <a:ea typeface="SimSun"/>
+        <a:ea typeface="Microsoft YaHei"/>
         <a:cs typeface="Arial"/>
       </a:minorFont>
     </a:fontScheme>
@@ -5889,12 +5792,12 @@
     <a:fontScheme name="Arial">
       <a:majorFont>
         <a:latin typeface="Arial"/>
-        <a:ea typeface="Arial"/>
+        <a:ea typeface="Microsoft YaHei"/>
         <a:cs typeface="Arial"/>
       </a:majorFont>
       <a:minorFont>
         <a:latin typeface="Arial"/>
-        <a:ea typeface="Arial"/>
+        <a:ea typeface="Microsoft YaHei"/>
         <a:cs typeface="Arial"/>
       </a:minorFont>
     </a:fontScheme>

--- a/slide/themes/src/32_the strategy.pptx
+++ b/slide/themes/src/32_the strategy.pptx
@@ -536,10 +536,7 @@
             <a:pPr>
               <a:defRPr/>
             </a:pPr>
-            <a:endParaRPr lang="en-US">
-              <a:latin typeface="Arial"/>
-              <a:cs typeface="Arial"/>
-            </a:endParaRPr>
+            <a:endParaRPr lang="en-US"/>
           </a:p>
         </p:txBody>
       </p:sp>
